--- a/@Materi Kuliah/Materi_Penambangan_Data_Kecerdasan_Buatan/Presentasi_Penambangan_Data_Kecerdasan_Buatan_Profesional_dari_HTML.pptx
+++ b/@Materi Kuliah/Materi_Penambangan_Data_Kecerdasan_Buatan/Presentasi_Penambangan_Data_Kecerdasan_Buatan_Profesional_dari_HTML.pptx
@@ -2,131 +2,36 @@
 <file path=ppt/presentation.xml><?xml version="1.0" encoding="utf-8"?>
 <p:presentation xmlns:p="http://schemas.openxmlformats.org/presentationml/2006/main">
   <p:sldMasterIdLst>
-    <p:sldMasterId xmlns:r="http://schemas.openxmlformats.org/officeDocument/2006/relationships" id="2147483648" r:id="Re072ee8e11704012"/>
+    <p:sldMasterId xmlns:r="http://schemas.openxmlformats.org/officeDocument/2006/relationships" id="2147483648" r:id="R74e35d38beb54fe6"/>
   </p:sldMasterIdLst>
   <p:notesMasterIdLst>
-    <p:notesMasterId xmlns:r="http://schemas.openxmlformats.org/officeDocument/2006/relationships" r:id="R713b4e86e46143e9"/>
+    <p:notesMasterId xmlns:r="http://schemas.openxmlformats.org/officeDocument/2006/relationships" r:id="R7542a92bb58f4484"/>
   </p:notesMasterIdLst>
   <p:sldIdLst>
-    <p:sldId xmlns:r="http://schemas.openxmlformats.org/officeDocument/2006/relationships" id="256" r:id="R41dbba5b0d674804"/>
-    <p:sldId xmlns:r="http://schemas.openxmlformats.org/officeDocument/2006/relationships" id="257" r:id="R483e6dbc70074bb8"/>
-    <p:sldId xmlns:r="http://schemas.openxmlformats.org/officeDocument/2006/relationships" id="258" r:id="Rb4f701212a874d36"/>
-    <p:sldId xmlns:r="http://schemas.openxmlformats.org/officeDocument/2006/relationships" id="259" r:id="R4db5a5a033fd45d6"/>
-    <p:sldId xmlns:r="http://schemas.openxmlformats.org/officeDocument/2006/relationships" id="260" r:id="R48aa626803624a01"/>
-    <p:sldId xmlns:r="http://schemas.openxmlformats.org/officeDocument/2006/relationships" id="261" r:id="Rcf924eb2a50f4979"/>
-    <p:sldId xmlns:r="http://schemas.openxmlformats.org/officeDocument/2006/relationships" id="262" r:id="R547a23b373054717"/>
-    <p:sldId xmlns:r="http://schemas.openxmlformats.org/officeDocument/2006/relationships" id="263" r:id="Rd6935f5b2a764731"/>
-    <p:sldId xmlns:r="http://schemas.openxmlformats.org/officeDocument/2006/relationships" id="264" r:id="R869a1b860b884700"/>
-    <p:sldId xmlns:r="http://schemas.openxmlformats.org/officeDocument/2006/relationships" id="265" r:id="R612a128e767d429b"/>
-    <p:sldId xmlns:r="http://schemas.openxmlformats.org/officeDocument/2006/relationships" id="266" r:id="R3e64ee1a46f94f91"/>
-    <p:sldId xmlns:r="http://schemas.openxmlformats.org/officeDocument/2006/relationships" id="267" r:id="Rf3fb3f9230f44ba6"/>
-    <p:sldId xmlns:r="http://schemas.openxmlformats.org/officeDocument/2006/relationships" id="268" r:id="Rc63b2368de754a61"/>
-    <p:sldId xmlns:r="http://schemas.openxmlformats.org/officeDocument/2006/relationships" id="269" r:id="Re4dbf1f48833417c"/>
-    <p:sldId xmlns:r="http://schemas.openxmlformats.org/officeDocument/2006/relationships" id="270" r:id="R31c7dc51c246411a"/>
-    <p:sldId xmlns:r="http://schemas.openxmlformats.org/officeDocument/2006/relationships" id="271" r:id="R0562960a46c441e9"/>
-    <p:sldId xmlns:r="http://schemas.openxmlformats.org/officeDocument/2006/relationships" id="272" r:id="Rfe284b74c9b24cfa"/>
-    <p:sldId xmlns:r="http://schemas.openxmlformats.org/officeDocument/2006/relationships" id="273" r:id="Rdda0c606fbf84882"/>
-    <p:sldId xmlns:r="http://schemas.openxmlformats.org/officeDocument/2006/relationships" id="274" r:id="R23d1572ac04247fc"/>
-    <p:sldId xmlns:r="http://schemas.openxmlformats.org/officeDocument/2006/relationships" id="275" r:id="R52c531e9b54c49ca"/>
-    <p:sldId xmlns:r="http://schemas.openxmlformats.org/officeDocument/2006/relationships" id="276" r:id="Rb43e03475841410b"/>
+    <p:sldId xmlns:r="http://schemas.openxmlformats.org/officeDocument/2006/relationships" id="256" r:id="R2a932e62a7b34127"/>
+    <p:sldId xmlns:r="http://schemas.openxmlformats.org/officeDocument/2006/relationships" id="257" r:id="R49db0cb31bbd45e7"/>
+    <p:sldId xmlns:r="http://schemas.openxmlformats.org/officeDocument/2006/relationships" id="258" r:id="Rb13258df388245f1"/>
+    <p:sldId xmlns:r="http://schemas.openxmlformats.org/officeDocument/2006/relationships" id="259" r:id="Rb9be8d8b21d34043"/>
+    <p:sldId xmlns:r="http://schemas.openxmlformats.org/officeDocument/2006/relationships" id="260" r:id="R186325bf1eed48da"/>
+    <p:sldId xmlns:r="http://schemas.openxmlformats.org/officeDocument/2006/relationships" id="261" r:id="R57ee8e133b7d4129"/>
+    <p:sldId xmlns:r="http://schemas.openxmlformats.org/officeDocument/2006/relationships" id="262" r:id="R1bcfc92568fb4c08"/>
+    <p:sldId xmlns:r="http://schemas.openxmlformats.org/officeDocument/2006/relationships" id="263" r:id="R26c8c8222beb4cb1"/>
+    <p:sldId xmlns:r="http://schemas.openxmlformats.org/officeDocument/2006/relationships" id="264" r:id="Ra0face39a2954e4a"/>
+    <p:sldId xmlns:r="http://schemas.openxmlformats.org/officeDocument/2006/relationships" id="265" r:id="R577aed968db844d2"/>
+    <p:sldId xmlns:r="http://schemas.openxmlformats.org/officeDocument/2006/relationships" id="266" r:id="R578bc7ea0e2d48cc"/>
+    <p:sldId xmlns:r="http://schemas.openxmlformats.org/officeDocument/2006/relationships" id="267" r:id="Rc2e93e829b73479b"/>
+    <p:sldId xmlns:r="http://schemas.openxmlformats.org/officeDocument/2006/relationships" id="268" r:id="R6d20483a6a0744b3"/>
+    <p:sldId xmlns:r="http://schemas.openxmlformats.org/officeDocument/2006/relationships" id="269" r:id="R5561925c540a4fe4"/>
+    <p:sldId xmlns:r="http://schemas.openxmlformats.org/officeDocument/2006/relationships" id="270" r:id="R1b9b210467104561"/>
+    <p:sldId xmlns:r="http://schemas.openxmlformats.org/officeDocument/2006/relationships" id="271" r:id="Rcd45813b3d824b7d"/>
+    <p:sldId xmlns:r="http://schemas.openxmlformats.org/officeDocument/2006/relationships" id="272" r:id="Rdf1c9c3d53b64cef"/>
+    <p:sldId xmlns:r="http://schemas.openxmlformats.org/officeDocument/2006/relationships" id="273" r:id="R6b513dd20a8745c2"/>
+    <p:sldId xmlns:r="http://schemas.openxmlformats.org/officeDocument/2006/relationships" id="274" r:id="Rd7167d755747416e"/>
+    <p:sldId xmlns:r="http://schemas.openxmlformats.org/officeDocument/2006/relationships" id="275" r:id="R914471987a2e44a2"/>
+    <p:sldId xmlns:r="http://schemas.openxmlformats.org/officeDocument/2006/relationships" id="276" r:id="Ra8195291a8f941ad"/>
   </p:sldIdLst>
   <p:sldSz cx="12192000" cy="6858000"/>
   <p:notesSz cx="6858000" cy="9144000"/>
-  <p:defaultTextStyle>
-    <a:defPPr xmlns:a="http://schemas.openxmlformats.org/drawingml/2006/main">
-      <a:defRPr lang="en-US"/>
-    </a:defPPr>
-    <a:lvl1pPr xmlns:a="http://schemas.openxmlformats.org/drawingml/2006/main" marL="0" indent="0" algn="l" defTabSz="914400">
-      <a:defRPr sz="1800" kern="1200">
-        <a:solidFill>
-          <a:schemeClr val="tx1"/>
-        </a:solidFill>
-        <a:latin typeface="+mn-lt"/>
-        <a:ea typeface="+mn-ea"/>
-        <a:cs typeface="+mn-cs"/>
-      </a:defRPr>
-    </a:lvl1pPr>
-    <a:lvl2pPr xmlns:a="http://schemas.openxmlformats.org/drawingml/2006/main" marL="457200" indent="0" algn="l" defTabSz="914400">
-      <a:defRPr sz="1800" kern="1200">
-        <a:solidFill>
-          <a:schemeClr val="tx1"/>
-        </a:solidFill>
-        <a:latin typeface="+mn-lt"/>
-        <a:ea typeface="+mn-ea"/>
-        <a:cs typeface="+mn-cs"/>
-      </a:defRPr>
-    </a:lvl2pPr>
-    <a:lvl3pPr xmlns:a="http://schemas.openxmlformats.org/drawingml/2006/main" marL="914400" indent="0" algn="l" defTabSz="914400">
-      <a:defRPr sz="1800" kern="1200">
-        <a:solidFill>
-          <a:schemeClr val="tx1"/>
-        </a:solidFill>
-        <a:latin typeface="+mn-lt"/>
-        <a:ea typeface="+mn-ea"/>
-        <a:cs typeface="+mn-cs"/>
-      </a:defRPr>
-    </a:lvl3pPr>
-    <a:lvl4pPr xmlns:a="http://schemas.openxmlformats.org/drawingml/2006/main" marL="1371600" indent="0" algn="l" defTabSz="914400">
-      <a:defRPr sz="1800" kern="1200">
-        <a:solidFill>
-          <a:schemeClr val="tx1"/>
-        </a:solidFill>
-        <a:latin typeface="+mn-lt"/>
-        <a:ea typeface="+mn-ea"/>
-        <a:cs typeface="+mn-cs"/>
-      </a:defRPr>
-    </a:lvl4pPr>
-    <a:lvl5pPr xmlns:a="http://schemas.openxmlformats.org/drawingml/2006/main" marL="1828800" indent="0" algn="l" defTabSz="914400">
-      <a:defRPr sz="1800" kern="1200">
-        <a:solidFill>
-          <a:schemeClr val="tx1"/>
-        </a:solidFill>
-        <a:latin typeface="+mn-lt"/>
-        <a:ea typeface="+mn-ea"/>
-        <a:cs typeface="+mn-cs"/>
-      </a:defRPr>
-    </a:lvl5pPr>
-    <a:lvl6pPr xmlns:a="http://schemas.openxmlformats.org/drawingml/2006/main" marL="2286000" indent="0" algn="l" defTabSz="914400">
-      <a:defRPr sz="1800" kern="1200">
-        <a:solidFill>
-          <a:schemeClr val="tx1"/>
-        </a:solidFill>
-        <a:latin typeface="+mn-lt"/>
-        <a:ea typeface="+mn-ea"/>
-        <a:cs typeface="+mn-cs"/>
-      </a:defRPr>
-    </a:lvl6pPr>
-    <a:lvl7pPr xmlns:a="http://schemas.openxmlformats.org/drawingml/2006/main" marL="2743200" indent="0" algn="l" defTabSz="914400">
-      <a:defRPr sz="1800" kern="1200">
-        <a:solidFill>
-          <a:schemeClr val="tx1"/>
-        </a:solidFill>
-        <a:latin typeface="+mn-lt"/>
-        <a:ea typeface="+mn-ea"/>
-        <a:cs typeface="+mn-cs"/>
-      </a:defRPr>
-    </a:lvl7pPr>
-    <a:lvl8pPr xmlns:a="http://schemas.openxmlformats.org/drawingml/2006/main" marL="3200400" indent="0" algn="l" defTabSz="914400">
-      <a:defRPr sz="1800" kern="1200">
-        <a:solidFill>
-          <a:schemeClr val="tx1"/>
-        </a:solidFill>
-        <a:latin typeface="+mn-lt"/>
-        <a:ea typeface="+mn-ea"/>
-        <a:cs typeface="+mn-cs"/>
-      </a:defRPr>
-    </a:lvl8pPr>
-    <a:lvl9pPr xmlns:a="http://schemas.openxmlformats.org/drawingml/2006/main" marL="3657600" indent="0" algn="l" defTabSz="914400">
-      <a:defRPr sz="1800" kern="1200">
-        <a:solidFill>
-          <a:schemeClr val="tx1"/>
-        </a:solidFill>
-        <a:latin typeface="+mn-lt"/>
-        <a:ea typeface="+mn-ea"/>
-        <a:cs typeface="+mn-cs"/>
-      </a:defRPr>
-    </a:lvl9pPr>
-  </p:defaultTextStyle>
 </p:presentation>
 </file>
 
@@ -1453,7 +1358,26 @@
         <p:txBody>
           <a:bodyPr xmlns:a="http://schemas.openxmlformats.org/drawingml/2006/main"/>
           <a:lstStyle xmlns:a="http://schemas.openxmlformats.org/drawingml/2006/main"/>
-          <a:p xmlns:a="http://schemas.openxmlformats.org/drawingml/2006/main"/>
+          <a:p xmlns:a="http://schemas.openxmlformats.org/drawingml/2006/main">
+            <a:r>
+              <a:t>[Sources]</a:t>
+            </a:r>
+          </a:p>
+          <a:p xmlns:a="http://schemas.openxmlformats.org/drawingml/2006/main">
+            <a:r>
+              <a:t>- RPS mata kuliah Revisi AI 2026, Program Studi S2 Statistika Terapan FMIPA Universitas Padjadjaran.</a:t>
+            </a:r>
+          </a:p>
+          <a:p xmlns:a="http://schemas.openxmlformats.org/drawingml/2006/main">
+            <a:r>
+              <a:t>[/Sources]</a:t>
+            </a:r>
+          </a:p>
+          <a:p xmlns:a="http://schemas.openxmlformats.org/drawingml/2006/main">
+            <a:r>
+              <a:t>Penutup: CPL tetap. AI adalah akselerator ketercapaian CPMK/Sub-CPMK, bukan pengganti penalaran statistika. Tekankan kewajiban prompt log ringkas, sumber, kode/notebook reproducible, validasi, dan audit trail.</a:t>
+            </a:r>
+          </a:p>
         </p:txBody>
       </p:sp>
       <p:sp>
@@ -2010,8 +1934,8 @@
   </p:cSld>
   <p:clrMap bg1="lt1" tx1="dk1" bg2="lt2" tx2="dk2" accent1="accent1" accent2="accent2" accent3="accent3" accent4="accent4" accent5="accent5" accent6="accent6" hlink="hlink" folHlink="folHlink"/>
   <p:sldLayoutIdLst>
-    <p:sldLayoutId xmlns:r="http://schemas.openxmlformats.org/officeDocument/2006/relationships" id="2147483649" r:id="Rf26ae5c242204328"/>
-    <p:sldLayoutId xmlns:r="http://schemas.openxmlformats.org/officeDocument/2006/relationships" id="2147483650" r:id="R6b369f0ad50c4c41"/>
+    <p:sldLayoutId xmlns:r="http://schemas.openxmlformats.org/officeDocument/2006/relationships" id="2147483649" r:id="Ra9a45fd0d9534a68"/>
+    <p:sldLayoutId xmlns:r="http://schemas.openxmlformats.org/officeDocument/2006/relationships" id="2147483650" r:id="Rb58c2d66f6894075"/>
   </p:sldLayoutIdLst>
   <p:hf sldNum="0" hdr="0" ftr="0" dt="0"/>
   <p:txStyles>
@@ -2577,7 +2501,7 @@
           <p:nvPr/>
         </p:nvPicPr>
         <p:blipFill>
-          <a:blip xmlns:r="http://schemas.openxmlformats.org/officeDocument/2006/relationships" xmlns:a="http://schemas.openxmlformats.org/drawingml/2006/main" r:embed="R4a11eb2d0aa14a5a"/>
+          <a:blip xmlns:r="http://schemas.openxmlformats.org/officeDocument/2006/relationships" xmlns:a="http://schemas.openxmlformats.org/drawingml/2006/main" r:embed="R5175e113d1094a7b"/>
           <a:stretch xmlns:a="http://schemas.openxmlformats.org/drawingml/2006/main">
             <a:fillRect l="0" t="0" r="0" b="0"/>
           </a:stretch>
@@ -2723,7 +2647,7 @@
           <p:nvPr/>
         </p:nvPicPr>
         <p:blipFill>
-          <a:blip xmlns:r="http://schemas.openxmlformats.org/officeDocument/2006/relationships" xmlns:a="http://schemas.openxmlformats.org/drawingml/2006/main" r:embed="R14b68893365d4477"/>
+          <a:blip xmlns:r="http://schemas.openxmlformats.org/officeDocument/2006/relationships" xmlns:a="http://schemas.openxmlformats.org/drawingml/2006/main" r:embed="R9f5f667041404a6f"/>
           <a:stretch xmlns:a="http://schemas.openxmlformats.org/drawingml/2006/main">
             <a:fillRect l="0" t="0" r="0" b="0"/>
           </a:stretch>
@@ -3345,7 +3269,7 @@
           <p:nvPr/>
         </p:nvPicPr>
         <p:blipFill>
-          <a:blip xmlns:r="http://schemas.openxmlformats.org/officeDocument/2006/relationships" xmlns:a="http://schemas.openxmlformats.org/drawingml/2006/main" r:embed="R1a71ee36e15e4b24"/>
+          <a:blip xmlns:r="http://schemas.openxmlformats.org/officeDocument/2006/relationships" xmlns:a="http://schemas.openxmlformats.org/drawingml/2006/main" r:embed="R10faa056941748ab"/>
           <a:stretch xmlns:a="http://schemas.openxmlformats.org/drawingml/2006/main">
             <a:fillRect l="0" t="0" r="0" b="0"/>
           </a:stretch>
@@ -5495,7 +5419,7 @@
           <p:nvPr/>
         </p:nvPicPr>
         <p:blipFill>
-          <a:blip xmlns:r="http://schemas.openxmlformats.org/officeDocument/2006/relationships" xmlns:a="http://schemas.openxmlformats.org/drawingml/2006/main" r:embed="R201ef9b8f12147ca"/>
+          <a:blip xmlns:r="http://schemas.openxmlformats.org/officeDocument/2006/relationships" xmlns:a="http://schemas.openxmlformats.org/drawingml/2006/main" r:embed="Rf18857a410244a45"/>
           <a:stretch xmlns:a="http://schemas.openxmlformats.org/drawingml/2006/main">
             <a:fillRect l="0" t="0" r="0" b="0"/>
           </a:stretch>
@@ -5774,7 +5698,7 @@
           <p:nvPr/>
         </p:nvPicPr>
         <p:blipFill>
-          <a:blip xmlns:r="http://schemas.openxmlformats.org/officeDocument/2006/relationships" xmlns:a="http://schemas.openxmlformats.org/drawingml/2006/main" r:embed="Ra7ab842d8a0c4c71"/>
+          <a:blip xmlns:r="http://schemas.openxmlformats.org/officeDocument/2006/relationships" xmlns:a="http://schemas.openxmlformats.org/drawingml/2006/main" r:embed="Rb140182fa51d465c"/>
           <a:stretch xmlns:a="http://schemas.openxmlformats.org/drawingml/2006/main">
             <a:fillRect l="0" t="0" r="0" b="0"/>
           </a:stretch>
@@ -7308,7 +7232,7 @@
           <p:nvPr/>
         </p:nvPicPr>
         <p:blipFill>
-          <a:blip xmlns:r="http://schemas.openxmlformats.org/officeDocument/2006/relationships" xmlns:a="http://schemas.openxmlformats.org/drawingml/2006/main" r:embed="Rd3a7e228114c4209"/>
+          <a:blip xmlns:r="http://schemas.openxmlformats.org/officeDocument/2006/relationships" xmlns:a="http://schemas.openxmlformats.org/drawingml/2006/main" r:embed="R2b652dbb07774d02"/>
           <a:stretch xmlns:a="http://schemas.openxmlformats.org/drawingml/2006/main">
             <a:fillRect l="0" t="0" r="0" b="0"/>
           </a:stretch>
@@ -8477,7 +8401,7 @@
           <p:nvPr/>
         </p:nvPicPr>
         <p:blipFill>
-          <a:blip xmlns:r="http://schemas.openxmlformats.org/officeDocument/2006/relationships" xmlns:a="http://schemas.openxmlformats.org/drawingml/2006/main" r:embed="R6443bd5fc3b74dd1"/>
+          <a:blip xmlns:r="http://schemas.openxmlformats.org/officeDocument/2006/relationships" xmlns:a="http://schemas.openxmlformats.org/drawingml/2006/main" r:embed="R72201bd2db2b4d6a"/>
           <a:stretch xmlns:a="http://schemas.openxmlformats.org/drawingml/2006/main">
             <a:fillRect l="0" t="0" r="0" b="0"/>
           </a:stretch>
@@ -9704,7 +9628,7 @@
           <p:nvPr/>
         </p:nvPicPr>
         <p:blipFill>
-          <a:blip xmlns:r="http://schemas.openxmlformats.org/officeDocument/2006/relationships" xmlns:a="http://schemas.openxmlformats.org/drawingml/2006/main" r:embed="Ra918d2a0f8d84f96"/>
+          <a:blip xmlns:r="http://schemas.openxmlformats.org/officeDocument/2006/relationships" xmlns:a="http://schemas.openxmlformats.org/drawingml/2006/main" r:embed="R0736d5021e6a4b60"/>
           <a:stretch xmlns:a="http://schemas.openxmlformats.org/drawingml/2006/main">
             <a:fillRect l="0" t="0" r="0" b="0"/>
           </a:stretch>
@@ -10909,7 +10833,7 @@
           <p:nvPr/>
         </p:nvPicPr>
         <p:blipFill>
-          <a:blip xmlns:r="http://schemas.openxmlformats.org/officeDocument/2006/relationships" xmlns:a="http://schemas.openxmlformats.org/drawingml/2006/main" r:embed="R658aab2b7f90475b"/>
+          <a:blip xmlns:r="http://schemas.openxmlformats.org/officeDocument/2006/relationships" xmlns:a="http://schemas.openxmlformats.org/drawingml/2006/main" r:embed="Rc95a882e580a40a9"/>
           <a:stretch xmlns:a="http://schemas.openxmlformats.org/drawingml/2006/main">
             <a:fillRect l="0" t="0" r="0" b="0"/>
           </a:stretch>
@@ -11188,7 +11112,7 @@
           <p:nvPr/>
         </p:nvPicPr>
         <p:blipFill>
-          <a:blip xmlns:r="http://schemas.openxmlformats.org/officeDocument/2006/relationships" xmlns:a="http://schemas.openxmlformats.org/drawingml/2006/main" r:embed="R6a564c1360604d6c"/>
+          <a:blip xmlns:r="http://schemas.openxmlformats.org/officeDocument/2006/relationships" xmlns:a="http://schemas.openxmlformats.org/drawingml/2006/main" r:embed="R09e748e012ba4865"/>
           <a:stretch xmlns:a="http://schemas.openxmlformats.org/drawingml/2006/main">
             <a:fillRect l="0" t="0" r="0" b="0"/>
           </a:stretch>
@@ -12733,7 +12657,7 @@
           <p:nvPr/>
         </p:nvPicPr>
         <p:blipFill>
-          <a:blip xmlns:r="http://schemas.openxmlformats.org/officeDocument/2006/relationships" xmlns:a="http://schemas.openxmlformats.org/drawingml/2006/main" r:embed="Ra1c355a57951442a"/>
+          <a:blip xmlns:r="http://schemas.openxmlformats.org/officeDocument/2006/relationships" xmlns:a="http://schemas.openxmlformats.org/drawingml/2006/main" r:embed="Rb351aa601bb44094"/>
           <a:stretch xmlns:a="http://schemas.openxmlformats.org/drawingml/2006/main">
             <a:fillRect l="0" t="0" r="0" b="0"/>
           </a:stretch>
@@ -14750,7 +14674,7 @@
           <p:nvPr/>
         </p:nvPicPr>
         <p:blipFill>
-          <a:blip xmlns:r="http://schemas.openxmlformats.org/officeDocument/2006/relationships" xmlns:a="http://schemas.openxmlformats.org/drawingml/2006/main" r:embed="R6957ec50f8c143ee"/>
+          <a:blip xmlns:r="http://schemas.openxmlformats.org/officeDocument/2006/relationships" xmlns:a="http://schemas.openxmlformats.org/drawingml/2006/main" r:embed="R4ca2eb53b6cd4142"/>
           <a:stretch xmlns:a="http://schemas.openxmlformats.org/drawingml/2006/main">
             <a:fillRect l="0" t="0" r="0" b="0"/>
           </a:stretch>
@@ -15977,7 +15901,7 @@
           <p:nvPr/>
         </p:nvPicPr>
         <p:blipFill>
-          <a:blip xmlns:r="http://schemas.openxmlformats.org/officeDocument/2006/relationships" xmlns:a="http://schemas.openxmlformats.org/drawingml/2006/main" r:embed="Re1653dec115349fd"/>
+          <a:blip xmlns:r="http://schemas.openxmlformats.org/officeDocument/2006/relationships" xmlns:a="http://schemas.openxmlformats.org/drawingml/2006/main" r:embed="Rc7dd2a0f8bd9401d"/>
           <a:stretch xmlns:a="http://schemas.openxmlformats.org/drawingml/2006/main">
             <a:fillRect l="0" t="0" r="0" b="0"/>
           </a:stretch>
@@ -17118,7 +17042,7 @@
           <p:nvPr/>
         </p:nvPicPr>
         <p:blipFill>
-          <a:blip xmlns:r="http://schemas.openxmlformats.org/officeDocument/2006/relationships" xmlns:a="http://schemas.openxmlformats.org/drawingml/2006/main" r:embed="Re65d3cae08824fad"/>
+          <a:blip xmlns:r="http://schemas.openxmlformats.org/officeDocument/2006/relationships" xmlns:a="http://schemas.openxmlformats.org/drawingml/2006/main" r:embed="R653617e21b82447f"/>
           <a:stretch xmlns:a="http://schemas.openxmlformats.org/drawingml/2006/main">
             <a:fillRect l="0" t="0" r="0" b="0"/>
           </a:stretch>
@@ -18583,7 +18507,7 @@
           <p:nvPr/>
         </p:nvPicPr>
         <p:blipFill>
-          <a:blip xmlns:r="http://schemas.openxmlformats.org/officeDocument/2006/relationships" xmlns:a="http://schemas.openxmlformats.org/drawingml/2006/main" r:embed="R9e1e64c707fc46aa"/>
+          <a:blip xmlns:r="http://schemas.openxmlformats.org/officeDocument/2006/relationships" xmlns:a="http://schemas.openxmlformats.org/drawingml/2006/main" r:embed="R0aa940881a9d424b"/>
           <a:stretch xmlns:a="http://schemas.openxmlformats.org/drawingml/2006/main">
             <a:fillRect l="0" t="0" r="0" b="0"/>
           </a:stretch>
@@ -18729,7 +18653,7 @@
           <p:nvPr/>
         </p:nvPicPr>
         <p:blipFill>
-          <a:blip xmlns:r="http://schemas.openxmlformats.org/officeDocument/2006/relationships" xmlns:a="http://schemas.openxmlformats.org/drawingml/2006/main" r:embed="R2acae1fdf3c84e87"/>
+          <a:blip xmlns:r="http://schemas.openxmlformats.org/officeDocument/2006/relationships" xmlns:a="http://schemas.openxmlformats.org/drawingml/2006/main" r:embed="R83b5c47de5824a61"/>
           <a:stretch xmlns:a="http://schemas.openxmlformats.org/drawingml/2006/main">
             <a:fillRect l="0" t="0" r="0" b="0"/>
           </a:stretch>
@@ -18833,7 +18757,7 @@
                 <a:ea typeface="Aptos Display"/>
                 <a:cs typeface="Aptos Display"/>
               </a:rPr>
-              <a:t>Dari data menuju</a:t>
+              <a:t>AI mempercepat proses,</a:t>
             </a:r>
           </a:p>
           <a:p xmlns:a="http://schemas.openxmlformats.org/drawingml/2006/main">
@@ -18849,7 +18773,7 @@
                 <a:ea typeface="Aptos Display"/>
                 <a:cs typeface="Aptos Display"/>
               </a:rPr>
-              <a:t>keputusan yang dapat diuji</a:t>
+              <a:t>penalaran tetap memimpin</a:t>
             </a:r>
           </a:p>
         </p:txBody>
@@ -18916,7 +18840,7 @@
         </p:spPr>
         <p:txBody>
           <a:bodyPr xmlns:a="http://schemas.openxmlformats.org/drawingml/2006/main" wrap="square" lIns="635" tIns="635" rIns="635" bIns="635" anchor="t">
-            <a:normAutofit fontScale="100000"/>
+            <a:normAutofit fontScale="93620"/>
           </a:bodyPr>
           <a:lstStyle xmlns:a="http://schemas.openxmlformats.org/drawingml/2006/main"/>
           <a:p xmlns:a="http://schemas.openxmlformats.org/drawingml/2006/main">
@@ -18932,7 +18856,7 @@
                 <a:ea typeface="Aptos"/>
                 <a:cs typeface="Aptos"/>
               </a:rPr>
-              <a:t>Data Mining &amp; AI menghubungkan teori, data, metode, validasi, dan komunikasi untuk menghasilkan keputusan yang sahih, dapat direplikasi, dan bertanggung jawab.</a:t>
+              <a:t>Penambangan Data Kecerdasan Buatan memadukan teori, data, komputasi, validasi, dan komunikasi. AI mempercepat eksplorasi dan pemeriksaan awal; mahasiswa tetap memverifikasi asumsi, kode, hasil numerik, ketidakpastian, sumber, dan dampak sebelum mengambil keputusan.</a:t>
             </a:r>
           </a:p>
         </p:txBody>
@@ -19102,7 +19026,7 @@
           <p:nvPr/>
         </p:nvPicPr>
         <p:blipFill>
-          <a:blip xmlns:r="http://schemas.openxmlformats.org/officeDocument/2006/relationships" xmlns:a="http://schemas.openxmlformats.org/drawingml/2006/main" r:embed="R2544619df4244d00"/>
+          <a:blip xmlns:r="http://schemas.openxmlformats.org/officeDocument/2006/relationships" xmlns:a="http://schemas.openxmlformats.org/drawingml/2006/main" r:embed="R0efaecda3ff14579"/>
           <a:stretch xmlns:a="http://schemas.openxmlformats.org/drawingml/2006/main">
             <a:fillRect l="0" t="0" r="0" b="0"/>
           </a:stretch>
@@ -20233,7 +20157,7 @@
           <p:nvPr/>
         </p:nvPicPr>
         <p:blipFill>
-          <a:blip xmlns:r="http://schemas.openxmlformats.org/officeDocument/2006/relationships" xmlns:a="http://schemas.openxmlformats.org/drawingml/2006/main" r:embed="Rf4b9d079f1604e3e"/>
+          <a:blip xmlns:r="http://schemas.openxmlformats.org/officeDocument/2006/relationships" xmlns:a="http://schemas.openxmlformats.org/drawingml/2006/main" r:embed="R48e2fdec35d14057"/>
           <a:stretch xmlns:a="http://schemas.openxmlformats.org/drawingml/2006/main">
             <a:fillRect l="0" t="0" r="0" b="0"/>
           </a:stretch>
@@ -22337,7 +22261,7 @@
           <p:nvPr/>
         </p:nvPicPr>
         <p:blipFill>
-          <a:blip xmlns:r="http://schemas.openxmlformats.org/officeDocument/2006/relationships" xmlns:a="http://schemas.openxmlformats.org/drawingml/2006/main" r:embed="R67e51d650de64cff"/>
+          <a:blip xmlns:r="http://schemas.openxmlformats.org/officeDocument/2006/relationships" xmlns:a="http://schemas.openxmlformats.org/drawingml/2006/main" r:embed="Rfb67f49216784b70"/>
           <a:stretch xmlns:a="http://schemas.openxmlformats.org/drawingml/2006/main">
             <a:fillRect l="0" t="0" r="0" b="0"/>
           </a:stretch>
@@ -23619,7 +23543,7 @@
           <p:nvPr/>
         </p:nvPicPr>
         <p:blipFill>
-          <a:blip xmlns:r="http://schemas.openxmlformats.org/officeDocument/2006/relationships" xmlns:a="http://schemas.openxmlformats.org/drawingml/2006/main" r:embed="Ra7894cfba3084da0"/>
+          <a:blip xmlns:r="http://schemas.openxmlformats.org/officeDocument/2006/relationships" xmlns:a="http://schemas.openxmlformats.org/drawingml/2006/main" r:embed="Re10bb843fdbb4319"/>
           <a:stretch xmlns:a="http://schemas.openxmlformats.org/drawingml/2006/main">
             <a:fillRect l="0" t="0" r="0" b="0"/>
           </a:stretch>
@@ -23898,7 +23822,7 @@
           <p:nvPr/>
         </p:nvPicPr>
         <p:blipFill>
-          <a:blip xmlns:r="http://schemas.openxmlformats.org/officeDocument/2006/relationships" xmlns:a="http://schemas.openxmlformats.org/drawingml/2006/main" r:embed="Re2ea517a4e414271"/>
+          <a:blip xmlns:r="http://schemas.openxmlformats.org/officeDocument/2006/relationships" xmlns:a="http://schemas.openxmlformats.org/drawingml/2006/main" r:embed="R7b8fda24bab34e87"/>
           <a:stretch xmlns:a="http://schemas.openxmlformats.org/drawingml/2006/main">
             <a:fillRect l="0" t="0" r="0" b="0"/>
           </a:stretch>
@@ -25978,7 +25902,7 @@
           <p:nvPr/>
         </p:nvPicPr>
         <p:blipFill>
-          <a:blip xmlns:r="http://schemas.openxmlformats.org/officeDocument/2006/relationships" xmlns:a="http://schemas.openxmlformats.org/drawingml/2006/main" r:embed="R73a6338824b94c1a"/>
+          <a:blip xmlns:r="http://schemas.openxmlformats.org/officeDocument/2006/relationships" xmlns:a="http://schemas.openxmlformats.org/drawingml/2006/main" r:embed="R5276c265fe464681"/>
           <a:stretch xmlns:a="http://schemas.openxmlformats.org/drawingml/2006/main">
             <a:fillRect l="0" t="0" r="0" b="0"/>
           </a:stretch>
@@ -27391,7 +27315,7 @@
           <p:nvPr/>
         </p:nvPicPr>
         <p:blipFill>
-          <a:blip xmlns:r="http://schemas.openxmlformats.org/officeDocument/2006/relationships" xmlns:a="http://schemas.openxmlformats.org/drawingml/2006/main" r:embed="R331a5e90c2484439"/>
+          <a:blip xmlns:r="http://schemas.openxmlformats.org/officeDocument/2006/relationships" xmlns:a="http://schemas.openxmlformats.org/drawingml/2006/main" r:embed="R527cd2aef5894fe4"/>
           <a:stretch xmlns:a="http://schemas.openxmlformats.org/drawingml/2006/main">
             <a:fillRect l="0" t="0" r="0" b="0"/>
           </a:stretch>
